--- a/reports/Bluestock_MF_Presentation.pptx
+++ b/reports/Bluestock_MF_Presentation.pptx
@@ -3631,7 +3631,7 @@
                   <a:schemeClr val="bg1"/>
                 </a:solidFill>
               </a:rPr>
-              <a:t>ID:BFDA76968</a:t>
+              <a:t>INTERN ID:BFDA76968</a:t>
             </a:r>
           </a:p>
           <a:p>
@@ -3644,7 +3644,23 @@
                   <a:schemeClr val="bg1"/>
                 </a:solidFill>
               </a:rPr>
-              <a:t>Suchithra.s.work@gmail.com</a:t>
+              <a:t>s</a:t>
+            </a:r>
+            <a:r>
+              <a:rPr lang="en-US" sz="1200" b="1">
+                <a:solidFill>
+                  <a:schemeClr val="bg1"/>
+                </a:solidFill>
+              </a:rPr>
+              <a:t>uchithra</a:t>
+            </a:r>
+            <a:r>
+              <a:rPr lang="en-US" sz="1200" b="1" dirty="0">
+                <a:solidFill>
+                  <a:schemeClr val="bg1"/>
+                </a:solidFill>
+              </a:rPr>
+              <a:t>.s.work@gmail.com</a:t>
             </a:r>
           </a:p>
           <a:p>
